--- a/powerpoints_2026/crisp_2026_R_day2.pptx
+++ b/powerpoints_2026/crisp_2026_R_day2.pptx
@@ -5,16 +5,17 @@
     <p:sldMasterId id="2147483648" r:id="rId1"/>
   </p:sldMasterIdLst>
   <p:notesMasterIdLst>
-    <p:notesMasterId r:id="rId9"/>
+    <p:notesMasterId r:id="rId10"/>
   </p:notesMasterIdLst>
   <p:sldIdLst>
     <p:sldId id="256" r:id="rId2"/>
-    <p:sldId id="273" r:id="rId3"/>
-    <p:sldId id="269" r:id="rId4"/>
-    <p:sldId id="257" r:id="rId5"/>
-    <p:sldId id="272" r:id="rId6"/>
-    <p:sldId id="270" r:id="rId7"/>
-    <p:sldId id="271" r:id="rId8"/>
+    <p:sldId id="274" r:id="rId3"/>
+    <p:sldId id="273" r:id="rId4"/>
+    <p:sldId id="269" r:id="rId5"/>
+    <p:sldId id="257" r:id="rId6"/>
+    <p:sldId id="272" r:id="rId7"/>
+    <p:sldId id="270" r:id="rId8"/>
+    <p:sldId id="271" r:id="rId9"/>
   </p:sldIdLst>
   <p:sldSz cx="12192000" cy="6858000"/>
   <p:notesSz cx="6858000" cy="9144000"/>
@@ -203,7 +204,7 @@
           <a:p>
             <a:fld id="{F9C8C89B-37FB-6044-B7FE-ED1648408672}" type="datetimeFigureOut">
               <a:rPr lang="en-US" smtClean="0"/>
-              <a:t>7/7/26</a:t>
+              <a:t>7/8/26</a:t>
             </a:fld>
             <a:endParaRPr lang="en-US"/>
           </a:p>
@@ -535,7 +536,7 @@
           <a:p>
             <a:fld id="{AA204E14-BC01-2144-B361-12211DA8646D}" type="slidenum">
               <a:rPr lang="en-US" smtClean="0"/>
-              <a:t>4</a:t>
+              <a:t>5</a:t>
             </a:fld>
             <a:endParaRPr lang="en-US"/>
           </a:p>
@@ -878,7 +879,7 @@
           <a:p>
             <a:fld id="{AA204E14-BC01-2144-B361-12211DA8646D}" type="slidenum">
               <a:rPr lang="en-US" smtClean="0"/>
-              <a:t>6</a:t>
+              <a:t>7</a:t>
             </a:fld>
             <a:endParaRPr lang="en-US"/>
           </a:p>
@@ -1044,7 +1045,7 @@
           <a:p>
             <a:fld id="{5D871124-1A9B-3D47-8EA4-BB13BEDD95F8}" type="datetimeFigureOut">
               <a:rPr lang="en-US" smtClean="0"/>
-              <a:t>7/7/26</a:t>
+              <a:t>7/8/26</a:t>
             </a:fld>
             <a:endParaRPr lang="en-US"/>
           </a:p>
@@ -1242,7 +1243,7 @@
           <a:p>
             <a:fld id="{5D871124-1A9B-3D47-8EA4-BB13BEDD95F8}" type="datetimeFigureOut">
               <a:rPr lang="en-US" smtClean="0"/>
-              <a:t>7/7/26</a:t>
+              <a:t>7/8/26</a:t>
             </a:fld>
             <a:endParaRPr lang="en-US"/>
           </a:p>
@@ -1450,7 +1451,7 @@
           <a:p>
             <a:fld id="{5D871124-1A9B-3D47-8EA4-BB13BEDD95F8}" type="datetimeFigureOut">
               <a:rPr lang="en-US" smtClean="0"/>
-              <a:t>7/7/26</a:t>
+              <a:t>7/8/26</a:t>
             </a:fld>
             <a:endParaRPr lang="en-US"/>
           </a:p>
@@ -1648,7 +1649,7 @@
           <a:p>
             <a:fld id="{5D871124-1A9B-3D47-8EA4-BB13BEDD95F8}" type="datetimeFigureOut">
               <a:rPr lang="en-US" smtClean="0"/>
-              <a:t>7/7/26</a:t>
+              <a:t>7/8/26</a:t>
             </a:fld>
             <a:endParaRPr lang="en-US"/>
           </a:p>
@@ -1923,7 +1924,7 @@
           <a:p>
             <a:fld id="{5D871124-1A9B-3D47-8EA4-BB13BEDD95F8}" type="datetimeFigureOut">
               <a:rPr lang="en-US" smtClean="0"/>
-              <a:t>7/7/26</a:t>
+              <a:t>7/8/26</a:t>
             </a:fld>
             <a:endParaRPr lang="en-US"/>
           </a:p>
@@ -2188,7 +2189,7 @@
           <a:p>
             <a:fld id="{5D871124-1A9B-3D47-8EA4-BB13BEDD95F8}" type="datetimeFigureOut">
               <a:rPr lang="en-US" smtClean="0"/>
-              <a:t>7/7/26</a:t>
+              <a:t>7/8/26</a:t>
             </a:fld>
             <a:endParaRPr lang="en-US"/>
           </a:p>
@@ -2600,7 +2601,7 @@
           <a:p>
             <a:fld id="{5D871124-1A9B-3D47-8EA4-BB13BEDD95F8}" type="datetimeFigureOut">
               <a:rPr lang="en-US" smtClean="0"/>
-              <a:t>7/7/26</a:t>
+              <a:t>7/8/26</a:t>
             </a:fld>
             <a:endParaRPr lang="en-US"/>
           </a:p>
@@ -2741,7 +2742,7 @@
           <a:p>
             <a:fld id="{5D871124-1A9B-3D47-8EA4-BB13BEDD95F8}" type="datetimeFigureOut">
               <a:rPr lang="en-US" smtClean="0"/>
-              <a:t>7/7/26</a:t>
+              <a:t>7/8/26</a:t>
             </a:fld>
             <a:endParaRPr lang="en-US"/>
           </a:p>
@@ -2854,7 +2855,7 @@
           <a:p>
             <a:fld id="{5D871124-1A9B-3D47-8EA4-BB13BEDD95F8}" type="datetimeFigureOut">
               <a:rPr lang="en-US" smtClean="0"/>
-              <a:t>7/7/26</a:t>
+              <a:t>7/8/26</a:t>
             </a:fld>
             <a:endParaRPr lang="en-US"/>
           </a:p>
@@ -3165,7 +3166,7 @@
           <a:p>
             <a:fld id="{5D871124-1A9B-3D47-8EA4-BB13BEDD95F8}" type="datetimeFigureOut">
               <a:rPr lang="en-US" smtClean="0"/>
-              <a:t>7/7/26</a:t>
+              <a:t>7/8/26</a:t>
             </a:fld>
             <a:endParaRPr lang="en-US"/>
           </a:p>
@@ -3453,7 +3454,7 @@
           <a:p>
             <a:fld id="{5D871124-1A9B-3D47-8EA4-BB13BEDD95F8}" type="datetimeFigureOut">
               <a:rPr lang="en-US" smtClean="0"/>
-              <a:t>7/7/26</a:t>
+              <a:t>7/8/26</a:t>
             </a:fld>
             <a:endParaRPr lang="en-US"/>
           </a:p>
@@ -3694,7 +3695,7 @@
           <a:p>
             <a:fld id="{5D871124-1A9B-3D47-8EA4-BB13BEDD95F8}" type="datetimeFigureOut">
               <a:rPr lang="en-US" smtClean="0"/>
-              <a:t>7/7/26</a:t>
+              <a:t>7/8/26</a:t>
             </a:fld>
             <a:endParaRPr lang="en-US"/>
           </a:p>
@@ -4216,6 +4217,131 @@
           <p:cNvPr id="2" name="Title 1">
             <a:extLst>
               <a:ext uri="{FF2B5EF4-FFF2-40B4-BE49-F238E27FC236}">
+                <a16:creationId xmlns:a16="http://schemas.microsoft.com/office/drawing/2014/main" id="{A20E4627-07E8-7145-B8CC-3D69A0F1F850}"/>
+              </a:ext>
+            </a:extLst>
+          </p:cNvPr>
+          <p:cNvSpPr>
+            <a:spLocks noGrp="1"/>
+          </p:cNvSpPr>
+          <p:nvPr>
+            <p:ph type="title"/>
+          </p:nvPr>
+        </p:nvSpPr>
+        <p:spPr/>
+        <p:txBody>
+          <a:bodyPr/>
+          <a:lstStyle/>
+          <a:p>
+            <a:r>
+              <a:rPr lang="en-US" dirty="0"/>
+              <a:t>Homework 1 posted on website</a:t>
+            </a:r>
+          </a:p>
+        </p:txBody>
+      </p:sp>
+      <p:sp>
+        <p:nvSpPr>
+          <p:cNvPr id="3" name="Content Placeholder 2">
+            <a:extLst>
+              <a:ext uri="{FF2B5EF4-FFF2-40B4-BE49-F238E27FC236}">
+                <a16:creationId xmlns:a16="http://schemas.microsoft.com/office/drawing/2014/main" id="{C1D1ED0E-413C-224E-B383-6D5FB8386B40}"/>
+              </a:ext>
+            </a:extLst>
+          </p:cNvPr>
+          <p:cNvSpPr>
+            <a:spLocks noGrp="1"/>
+          </p:cNvSpPr>
+          <p:nvPr>
+            <p:ph idx="1"/>
+          </p:nvPr>
+        </p:nvSpPr>
+        <p:spPr/>
+        <p:txBody>
+          <a:bodyPr/>
+          <a:lstStyle/>
+          <a:p>
+            <a:r>
+              <a:rPr lang="en-US" dirty="0"/>
+              <a:t>Optional but encouraged! </a:t>
+            </a:r>
+            <a:endParaRPr lang="en-US" dirty="0">
+              <a:hlinkClick r:id="rId2"/>
+            </a:endParaRPr>
+          </a:p>
+          <a:p>
+            <a:endParaRPr lang="en-US" dirty="0">
+              <a:hlinkClick r:id="rId2"/>
+            </a:endParaRPr>
+          </a:p>
+          <a:p>
+            <a:r>
+              <a:rPr lang="en-US" dirty="0">
+                <a:hlinkClick r:id="rId2"/>
+              </a:rPr>
+              <a:t>bit.ly/crisp2026</a:t>
+            </a:r>
+            <a:endParaRPr lang="en-US" dirty="0"/>
+          </a:p>
+          <a:p>
+            <a:pPr marL="0" indent="0">
+              <a:buNone/>
+            </a:pPr>
+            <a:endParaRPr lang="en-US" dirty="0"/>
+          </a:p>
+          <a:p>
+            <a:r>
+              <a:rPr lang="en-US" dirty="0"/>
+              <a:t>Due on Monday, July 13 - email to me at </a:t>
+            </a:r>
+            <a:r>
+              <a:rPr lang="en-US" dirty="0">
+                <a:hlinkClick r:id="rId3"/>
+              </a:rPr>
+              <a:t>jpspeng@uw.edu</a:t>
+            </a:r>
+            <a:r>
+              <a:rPr lang="en-US" dirty="0"/>
+              <a:t> </a:t>
+            </a:r>
+          </a:p>
+        </p:txBody>
+      </p:sp>
+    </p:spTree>
+    <p:extLst>
+      <p:ext uri="{BB962C8B-B14F-4D97-AF65-F5344CB8AC3E}">
+        <p14:creationId xmlns:p14="http://schemas.microsoft.com/office/powerpoint/2010/main" val="3551589108"/>
+      </p:ext>
+    </p:extLst>
+  </p:cSld>
+  <p:clrMapOvr>
+    <a:masterClrMapping/>
+  </p:clrMapOvr>
+</p:sld>
+</file>
+
+<file path=ppt/slides/slide3.xml><?xml version="1.0" encoding="utf-8"?>
+<p:sld xmlns:a="http://schemas.openxmlformats.org/drawingml/2006/main" xmlns:r="http://schemas.openxmlformats.org/officeDocument/2006/relationships" xmlns:p="http://schemas.openxmlformats.org/presentationml/2006/main">
+  <p:cSld>
+    <p:spTree>
+      <p:nvGrpSpPr>
+        <p:cNvPr id="1" name=""/>
+        <p:cNvGrpSpPr/>
+        <p:nvPr/>
+      </p:nvGrpSpPr>
+      <p:grpSpPr>
+        <a:xfrm>
+          <a:off x="0" y="0"/>
+          <a:ext cx="0" cy="0"/>
+          <a:chOff x="0" y="0"/>
+          <a:chExt cx="0" cy="0"/>
+        </a:xfrm>
+      </p:grpSpPr>
+      <p:sp>
+        <p:nvSpPr>
+          <p:cNvPr id="2" name="Title 1">
+            <a:extLst>
+              <a:ext uri="{FF2B5EF4-FFF2-40B4-BE49-F238E27FC236}">
                 <a16:creationId xmlns:a16="http://schemas.microsoft.com/office/drawing/2014/main" id="{9870FFEB-61D7-6D4D-A688-0CFC065CAC2F}"/>
               </a:ext>
             </a:extLst>
@@ -4551,7 +4677,7 @@
 </p:sld>
 </file>
 
-<file path=ppt/slides/slide3.xml><?xml version="1.0" encoding="utf-8"?>
+<file path=ppt/slides/slide4.xml><?xml version="1.0" encoding="utf-8"?>
 <p:sld xmlns:a="http://schemas.openxmlformats.org/drawingml/2006/main" xmlns:r="http://schemas.openxmlformats.org/officeDocument/2006/relationships" xmlns:p="http://schemas.openxmlformats.org/presentationml/2006/main">
   <p:cSld>
     <p:spTree>
@@ -4809,7 +4935,7 @@
 </p:sld>
 </file>
 
-<file path=ppt/slides/slide4.xml><?xml version="1.0" encoding="utf-8"?>
+<file path=ppt/slides/slide5.xml><?xml version="1.0" encoding="utf-8"?>
 <p:sld xmlns:a="http://schemas.openxmlformats.org/drawingml/2006/main" xmlns:r="http://schemas.openxmlformats.org/officeDocument/2006/relationships" xmlns:p="http://schemas.openxmlformats.org/presentationml/2006/main">
   <p:cSld>
     <p:spTree>
@@ -4948,7 +5074,7 @@
 </p:sld>
 </file>
 
-<file path=ppt/slides/slide5.xml><?xml version="1.0" encoding="utf-8"?>
+<file path=ppt/slides/slide6.xml><?xml version="1.0" encoding="utf-8"?>
 <p:sld xmlns:a="http://schemas.openxmlformats.org/drawingml/2006/main" xmlns:r="http://schemas.openxmlformats.org/officeDocument/2006/relationships" xmlns:p="http://schemas.openxmlformats.org/presentationml/2006/main">
   <p:cSld>
     <p:spTree>
@@ -5320,7 +5446,7 @@
 </p:sld>
 </file>
 
-<file path=ppt/slides/slide6.xml><?xml version="1.0" encoding="utf-8"?>
+<file path=ppt/slides/slide7.xml><?xml version="1.0" encoding="utf-8"?>
 <p:sld xmlns:a="http://schemas.openxmlformats.org/drawingml/2006/main" xmlns:r="http://schemas.openxmlformats.org/officeDocument/2006/relationships" xmlns:p="http://schemas.openxmlformats.org/presentationml/2006/main">
   <p:cSld>
     <p:spTree>
@@ -5454,7 +5580,7 @@
 </p:sld>
 </file>
 
-<file path=ppt/slides/slide7.xml><?xml version="1.0" encoding="utf-8"?>
+<file path=ppt/slides/slide8.xml><?xml version="1.0" encoding="utf-8"?>
 <p:sld xmlns:a="http://schemas.openxmlformats.org/drawingml/2006/main" xmlns:r="http://schemas.openxmlformats.org/officeDocument/2006/relationships" xmlns:p="http://schemas.openxmlformats.org/presentationml/2006/main">
   <p:cSld>
     <p:spTree>
